--- a/HBM4_HBM4E_Showcase.pptx
+++ b/HBM4_HBM4E_Showcase.pptx
@@ -13,13 +13,6 @@
     <p:sldId id="261" r:id="rId12"/>
     <p:sldId id="262" r:id="rId13"/>
     <p:sldId id="263" r:id="rId14"/>
-    <p:sldId id="264" r:id="rId15"/>
-    <p:sldId id="265" r:id="rId16"/>
-    <p:sldId id="266" r:id="rId17"/>
-    <p:sldId id="267" r:id="rId18"/>
-    <p:sldId id="268" r:id="rId19"/>
-    <p:sldId id="269" r:id="rId20"/>
-    <p:sldId id="270" r:id="rId21"/>
   </p:sldIdLst>
   <p:sldSz cx="12191695" cy="6858000" type="screen4x3"/>
   <p:notesSz cx="6858000" cy="9144000"/>
@@ -3230,797 +3223,6 @@
 </p:sld>
 </file>
 
-<file path=ppt/slides/slide10.xml><?xml version="1.0" encoding="utf-8"?>
-<p:sld xmlns:a="http://schemas.openxmlformats.org/drawingml/2006/main" xmlns:p="http://schemas.openxmlformats.org/presentationml/2006/main" xmlns:r="http://schemas.openxmlformats.org/officeDocument/2006/relationships">
-  <p:cSld>
-    <p:bg>
-      <p:bgPr>
-        <a:solidFill>
-          <a:srgbClr val="0A0B14"/>
-        </a:solidFill>
-        <a:effectLst/>
-      </p:bgPr>
-    </p:bg>
-    <p:spTree>
-      <p:nvGrpSpPr>
-        <p:cNvPr id="1" name=""/>
-        <p:cNvGrpSpPr/>
-        <p:nvPr/>
-      </p:nvGrpSpPr>
-      <p:grpSpPr/>
-      <p:sp>
-        <p:nvSpPr>
-          <p:cNvPr id="2" name="TextBox 1"/>
-          <p:cNvSpPr txBox="1"/>
-          <p:nvPr/>
-        </p:nvSpPr>
-        <p:spPr>
-          <a:xfrm>
-            <a:off x="731520" y="457200"/>
-            <a:ext cx="10515600" cy="731520"/>
-          </a:xfrm>
-          <a:prstGeom prst="rect">
-            <a:avLst/>
-          </a:prstGeom>
-          <a:noFill/>
-        </p:spPr>
-        <p:txBody>
-          <a:bodyPr wrap="square">
-            <a:spAutoFit/>
-          </a:bodyPr>
-          <a:lstStyle/>
-          <a:p>
-            <a:pPr>
-              <a:defRPr sz="3600" b="1">
-                <a:solidFill>
-                  <a:srgbClr val="F5F7FA"/>
-                </a:solidFill>
-                <a:latin typeface="Segoe UI"/>
-              </a:defRPr>
-            </a:pPr>
-            <a:r>
-              <a:t>Thermal Management &amp; Heat Dispersion</a:t>
-            </a:r>
-          </a:p>
-        </p:txBody>
-      </p:sp>
-      <p:sp>
-        <p:nvSpPr>
-          <p:cNvPr id="3" name="TextBox 2"/>
-          <p:cNvSpPr txBox="1"/>
-          <p:nvPr/>
-        </p:nvSpPr>
-        <p:spPr>
-          <a:xfrm>
-            <a:off x="731520" y="1463040"/>
-            <a:ext cx="10515600" cy="4389120"/>
-          </a:xfrm>
-          <a:prstGeom prst="rect">
-            <a:avLst/>
-          </a:prstGeom>
-          <a:noFill/>
-        </p:spPr>
-        <p:txBody>
-          <a:bodyPr wrap="square">
-            <a:spAutoFit/>
-          </a:bodyPr>
-          <a:lstStyle/>
-          <a:p>
-            <a:pPr>
-              <a:spcAft>
-                <a:spcPts val="1400"/>
-              </a:spcAft>
-              <a:defRPr sz="1800">
-                <a:solidFill>
-                  <a:srgbClr val="F5F7FA"/>
-                </a:solidFill>
-                <a:latin typeface="Segoe UI"/>
-              </a:defRPr>
-            </a:pPr>
-            <a:r>
-              <a:t>Thermal Stacking Penalty: Stacking 16 hot memory layers traps heat in the center cells.</a:t>
-            </a:r>
-          </a:p>
-          <a:p>
-            <a:pPr>
-              <a:spcAft>
-                <a:spcPts val="1400"/>
-              </a:spcAft>
-              <a:defRPr sz="1800">
-                <a:solidFill>
-                  <a:srgbClr val="F5F7FA"/>
-                </a:solidFill>
-                <a:latin typeface="Segoe UI"/>
-              </a:defRPr>
-            </a:pPr>
-            <a:r>
-              <a:t>Underfill Material: Epoxy underfills are loaded with alumina particles to help conduct heat away vertically.</a:t>
-            </a:r>
-          </a:p>
-          <a:p>
-            <a:pPr>
-              <a:spcAft>
-                <a:spcPts val="1400"/>
-              </a:spcAft>
-              <a:defRPr sz="1800">
-                <a:solidFill>
-                  <a:srgbClr val="F5F7FA"/>
-                </a:solidFill>
-                <a:latin typeface="Segoe UI"/>
-              </a:defRPr>
-            </a:pPr>
-            <a:r>
-              <a:t>High-Thermal Metal Lid: A conductive metal alloy cap covers the top of the stack to extract heat to system fans.</a:t>
-            </a:r>
-          </a:p>
-          <a:p>
-            <a:pPr>
-              <a:spcAft>
-                <a:spcPts val="1400"/>
-              </a:spcAft>
-              <a:defRPr sz="1800">
-                <a:solidFill>
-                  <a:srgbClr val="F5F7FA"/>
-                </a:solidFill>
-                <a:latin typeface="Segoe UI"/>
-              </a:defRPr>
-            </a:pPr>
-            <a:r>
-              <a:t>Micro-cooling Vias: Unconnected dummy TSVs are placed inside memory layers to act as passive heat pipelines.</a:t>
-            </a:r>
-          </a:p>
-        </p:txBody>
-      </p:sp>
-    </p:spTree>
-  </p:cSld>
-  <p:clrMapOvr>
-    <a:masterClrMapping/>
-  </p:clrMapOvr>
-</p:sld>
-</file>
-
-<file path=ppt/slides/slide11.xml><?xml version="1.0" encoding="utf-8"?>
-<p:sld xmlns:a="http://schemas.openxmlformats.org/drawingml/2006/main" xmlns:p="http://schemas.openxmlformats.org/presentationml/2006/main" xmlns:r="http://schemas.openxmlformats.org/officeDocument/2006/relationships">
-  <p:cSld>
-    <p:bg>
-      <p:bgPr>
-        <a:solidFill>
-          <a:srgbClr val="0A0B14"/>
-        </a:solidFill>
-        <a:effectLst/>
-      </p:bgPr>
-    </p:bg>
-    <p:spTree>
-      <p:nvGrpSpPr>
-        <p:cNvPr id="1" name=""/>
-        <p:cNvGrpSpPr/>
-        <p:nvPr/>
-      </p:nvGrpSpPr>
-      <p:grpSpPr/>
-      <p:sp>
-        <p:nvSpPr>
-          <p:cNvPr id="2" name="TextBox 1"/>
-          <p:cNvSpPr txBox="1"/>
-          <p:nvPr/>
-        </p:nvSpPr>
-        <p:spPr>
-          <a:xfrm>
-            <a:off x="731520" y="457200"/>
-            <a:ext cx="10515600" cy="731520"/>
-          </a:xfrm>
-          <a:prstGeom prst="rect">
-            <a:avLst/>
-          </a:prstGeom>
-          <a:noFill/>
-        </p:spPr>
-        <p:txBody>
-          <a:bodyPr wrap="square">
-            <a:spAutoFit/>
-          </a:bodyPr>
-          <a:lstStyle/>
-          <a:p>
-            <a:pPr>
-              <a:defRPr sz="3600" b="1">
-                <a:solidFill>
-                  <a:srgbClr val="F5F7FA"/>
-                </a:solidFill>
-                <a:latin typeface="Segoe UI"/>
-              </a:defRPr>
-            </a:pPr>
-            <a:r>
-              <a:t>Eco-Footprint &amp; Energy Efficiency</a:t>
-            </a:r>
-          </a:p>
-        </p:txBody>
-      </p:sp>
-      <p:sp>
-        <p:nvSpPr>
-          <p:cNvPr id="3" name="TextBox 2"/>
-          <p:cNvSpPr txBox="1"/>
-          <p:nvPr/>
-        </p:nvSpPr>
-        <p:spPr>
-          <a:xfrm>
-            <a:off x="731520" y="1463040"/>
-            <a:ext cx="10515600" cy="4389120"/>
-          </a:xfrm>
-          <a:prstGeom prst="rect">
-            <a:avLst/>
-          </a:prstGeom>
-          <a:noFill/>
-        </p:spPr>
-        <p:txBody>
-          <a:bodyPr wrap="square">
-            <a:spAutoFit/>
-          </a:bodyPr>
-          <a:lstStyle/>
-          <a:p>
-            <a:pPr>
-              <a:spcAft>
-                <a:spcPts val="1400"/>
-              </a:spcAft>
-              <a:defRPr sz="1800">
-                <a:solidFill>
-                  <a:srgbClr val="F5F7FA"/>
-                </a:solidFill>
-                <a:latin typeface="Segoe UI"/>
-              </a:defRPr>
-            </a:pPr>
-            <a:r>
-              <a:t>Energy Drop: 3D stacking drops operational energy by ~30% compared to GDDR7 pipelines.</a:t>
-            </a:r>
-          </a:p>
-          <a:p>
-            <a:pPr>
-              <a:spcAft>
-                <a:spcPts val="1400"/>
-              </a:spcAft>
-              <a:defRPr sz="1800">
-                <a:solidFill>
-                  <a:srgbClr val="F5F7FA"/>
-                </a:solidFill>
-                <a:latin typeface="Segoe UI"/>
-              </a:defRPr>
-            </a:pPr>
-            <a:r>
-              <a:t>Short Channels: Keeping copper wires ultra-short prevents electrical losses (impedance core dissipation).</a:t>
-            </a:r>
-          </a:p>
-          <a:p>
-            <a:pPr>
-              <a:spcAft>
-                <a:spcPts val="1400"/>
-              </a:spcAft>
-              <a:defRPr sz="1800">
-                <a:solidFill>
-                  <a:srgbClr val="F5F7FA"/>
-                </a:solidFill>
-                <a:latin typeface="Segoe UI"/>
-              </a:defRPr>
-            </a:pPr>
-            <a:r>
-              <a:t>Green AI Datacenters: Lower memory energy prevents high cooling overheads, reducing global CO2 footprints.</a:t>
-            </a:r>
-          </a:p>
-          <a:p>
-            <a:pPr>
-              <a:spcAft>
-                <a:spcPts val="1400"/>
-              </a:spcAft>
-              <a:defRPr sz="1800">
-                <a:solidFill>
-                  <a:srgbClr val="F5F7FA"/>
-                </a:solidFill>
-                <a:latin typeface="Segoe UI"/>
-              </a:defRPr>
-            </a:pPr>
-            <a:r>
-              <a:t>Low VDDQ Core Voltages: Drops logic supply voltages to 1.1V/0.4V to keep power consumption low.</a:t>
-            </a:r>
-          </a:p>
-        </p:txBody>
-      </p:sp>
-    </p:spTree>
-  </p:cSld>
-  <p:clrMapOvr>
-    <a:masterClrMapping/>
-  </p:clrMapOvr>
-</p:sld>
-</file>
-
-<file path=ppt/slides/slide12.xml><?xml version="1.0" encoding="utf-8"?>
-<p:sld xmlns:a="http://schemas.openxmlformats.org/drawingml/2006/main" xmlns:p="http://schemas.openxmlformats.org/presentationml/2006/main" xmlns:r="http://schemas.openxmlformats.org/officeDocument/2006/relationships">
-  <p:cSld>
-    <p:bg>
-      <p:bgPr>
-        <a:solidFill>
-          <a:srgbClr val="0A0B14"/>
-        </a:solidFill>
-        <a:effectLst/>
-      </p:bgPr>
-    </p:bg>
-    <p:spTree>
-      <p:nvGrpSpPr>
-        <p:cNvPr id="1" name=""/>
-        <p:cNvGrpSpPr/>
-        <p:nvPr/>
-      </p:nvGrpSpPr>
-      <p:grpSpPr/>
-      <p:sp>
-        <p:nvSpPr>
-          <p:cNvPr id="2" name="TextBox 1"/>
-          <p:cNvSpPr txBox="1"/>
-          <p:nvPr/>
-        </p:nvSpPr>
-        <p:spPr>
-          <a:xfrm>
-            <a:off x="731520" y="457200"/>
-            <a:ext cx="10515600" cy="731520"/>
-          </a:xfrm>
-          <a:prstGeom prst="rect">
-            <a:avLst/>
-          </a:prstGeom>
-          <a:noFill/>
-        </p:spPr>
-        <p:txBody>
-          <a:bodyPr wrap="square">
-            <a:spAutoFit/>
-          </a:bodyPr>
-          <a:lstStyle/>
-          <a:p>
-            <a:pPr>
-              <a:defRPr sz="3600" b="1">
-                <a:solidFill>
-                  <a:srgbClr val="F5F7FA"/>
-                </a:solidFill>
-                <a:latin typeface="Segoe UI"/>
-              </a:defRPr>
-            </a:pPr>
-            <a:r>
-              <a:t>Global Market &amp; Business Ecosystem</a:t>
-            </a:r>
-          </a:p>
-        </p:txBody>
-      </p:sp>
-      <p:sp>
-        <p:nvSpPr>
-          <p:cNvPr id="3" name="TextBox 2"/>
-          <p:cNvSpPr txBox="1"/>
-          <p:nvPr/>
-        </p:nvSpPr>
-        <p:spPr>
-          <a:xfrm>
-            <a:off x="731520" y="1463040"/>
-            <a:ext cx="10515600" cy="4389120"/>
-          </a:xfrm>
-          <a:prstGeom prst="rect">
-            <a:avLst/>
-          </a:prstGeom>
-          <a:noFill/>
-        </p:spPr>
-        <p:txBody>
-          <a:bodyPr wrap="square">
-            <a:spAutoFit/>
-          </a:bodyPr>
-          <a:lstStyle/>
-          <a:p>
-            <a:pPr>
-              <a:spcAft>
-                <a:spcPts val="1400"/>
-              </a:spcAft>
-              <a:defRPr sz="1800">
-                <a:solidFill>
-                  <a:srgbClr val="F5F7FA"/>
-                </a:solidFill>
-                <a:latin typeface="Segoe UI"/>
-              </a:defRPr>
-            </a:pPr>
-            <a:r>
-              <a:t>Core Memory Producers: SK Hynix, Samsung Electronics, and Micron Technologies lead wafer stacks.</a:t>
-            </a:r>
-          </a:p>
-          <a:p>
-            <a:pPr>
-              <a:spcAft>
-                <a:spcPts val="1400"/>
-              </a:spcAft>
-              <a:defRPr sz="1800">
-                <a:solidFill>
-                  <a:srgbClr val="F5F7FA"/>
-                </a:solidFill>
-                <a:latin typeface="Segoe UI"/>
-              </a:defRPr>
-            </a:pPr>
-            <a:r>
-              <a:t>Advanced Foundries: TSMC, Samsung, and Intel build the custom high-performance logic base dies.</a:t>
-            </a:r>
-          </a:p>
-          <a:p>
-            <a:pPr>
-              <a:spcAft>
-                <a:spcPts val="1400"/>
-              </a:spcAft>
-              <a:defRPr sz="1800">
-                <a:solidFill>
-                  <a:srgbClr val="F5F7FA"/>
-                </a:solidFill>
-                <a:latin typeface="Segoe UI"/>
-              </a:defRPr>
-            </a:pPr>
-            <a:r>
-              <a:t>Datacenter Offtakers: NVIDIA (Hopper/Blackwell), AMD (Instinct MI300/400), Google (TPUs), and AWS.</a:t>
-            </a:r>
-          </a:p>
-          <a:p>
-            <a:pPr>
-              <a:spcAft>
-                <a:spcPts val="1400"/>
-              </a:spcAft>
-              <a:defRPr sz="1800">
-                <a:solidFill>
-                  <a:srgbClr val="F5F7FA"/>
-                </a:solidFill>
-                <a:latin typeface="Segoe UI"/>
-              </a:defRPr>
-            </a:pPr>
-            <a:r>
-              <a:t>Joint Engineering: Foundry-Memory alliances are crucial to align pad pitches under 10μm.</a:t>
-            </a:r>
-          </a:p>
-        </p:txBody>
-      </p:sp>
-    </p:spTree>
-  </p:cSld>
-  <p:clrMapOvr>
-    <a:masterClrMapping/>
-  </p:clrMapOvr>
-</p:sld>
-</file>
-
-<file path=ppt/slides/slide13.xml><?xml version="1.0" encoding="utf-8"?>
-<p:sld xmlns:a="http://schemas.openxmlformats.org/drawingml/2006/main" xmlns:p="http://schemas.openxmlformats.org/presentationml/2006/main" xmlns:r="http://schemas.openxmlformats.org/officeDocument/2006/relationships">
-  <p:cSld>
-    <p:bg>
-      <p:bgPr>
-        <a:solidFill>
-          <a:srgbClr val="0A0B14"/>
-        </a:solidFill>
-        <a:effectLst/>
-      </p:bgPr>
-    </p:bg>
-    <p:spTree>
-      <p:nvGrpSpPr>
-        <p:cNvPr id="1" name=""/>
-        <p:cNvGrpSpPr/>
-        <p:nvPr/>
-      </p:nvGrpSpPr>
-      <p:grpSpPr/>
-      <p:sp>
-        <p:nvSpPr>
-          <p:cNvPr id="2" name="TextBox 1"/>
-          <p:cNvSpPr txBox="1"/>
-          <p:nvPr/>
-        </p:nvSpPr>
-        <p:spPr>
-          <a:xfrm>
-            <a:off x="731520" y="457200"/>
-            <a:ext cx="10515600" cy="731520"/>
-          </a:xfrm>
-          <a:prstGeom prst="rect">
-            <a:avLst/>
-          </a:prstGeom>
-          <a:noFill/>
-        </p:spPr>
-        <p:txBody>
-          <a:bodyPr wrap="square">
-            <a:spAutoFit/>
-          </a:bodyPr>
-          <a:lstStyle/>
-          <a:p>
-            <a:pPr>
-              <a:defRPr sz="3600" b="1">
-                <a:solidFill>
-                  <a:srgbClr val="F5F7FA"/>
-                </a:solidFill>
-                <a:latin typeface="Segoe UI"/>
-              </a:defRPr>
-            </a:pPr>
-            <a:r>
-              <a:t>Future Roadmap Timeline</a:t>
-            </a:r>
-          </a:p>
-        </p:txBody>
-      </p:sp>
-      <p:sp>
-        <p:nvSpPr>
-          <p:cNvPr id="3" name="TextBox 2"/>
-          <p:cNvSpPr txBox="1"/>
-          <p:nvPr/>
-        </p:nvSpPr>
-        <p:spPr>
-          <a:xfrm>
-            <a:off x="731520" y="1463040"/>
-            <a:ext cx="10515600" cy="4389120"/>
-          </a:xfrm>
-          <a:prstGeom prst="rect">
-            <a:avLst/>
-          </a:prstGeom>
-          <a:noFill/>
-        </p:spPr>
-        <p:txBody>
-          <a:bodyPr wrap="square">
-            <a:spAutoFit/>
-          </a:bodyPr>
-          <a:lstStyle/>
-          <a:p>
-            <a:pPr>
-              <a:spcAft>
-                <a:spcPts val="1400"/>
-              </a:spcAft>
-              <a:defRPr sz="1800">
-                <a:solidFill>
-                  <a:srgbClr val="F5F7FA"/>
-                </a:solidFill>
-                <a:latin typeface="Segoe UI"/>
-              </a:defRPr>
-            </a:pPr>
-            <a:r>
-              <a:t>2024: HBM3E volume production. 36 GB capacity, VDDQ at 1.1V, supporting high-speed training.</a:t>
-            </a:r>
-          </a:p>
-          <a:p>
-            <a:pPr>
-              <a:spcAft>
-                <a:spcPts val="1400"/>
-              </a:spcAft>
-              <a:defRPr sz="1800">
-                <a:solidFill>
-                  <a:srgbClr val="F5F7FA"/>
-                </a:solidFill>
-                <a:latin typeface="Segoe UI"/>
-              </a:defRPr>
-            </a:pPr>
-            <a:r>
-              <a:t>2025/2026: HBM4 launch. 48 GB stack size, 2048-bit bus width. Transition to custom logic base dies.</a:t>
-            </a:r>
-          </a:p>
-          <a:p>
-            <a:pPr>
-              <a:spcAft>
-                <a:spcPts val="1400"/>
-              </a:spcAft>
-              <a:defRPr sz="1800">
-                <a:solidFill>
-                  <a:srgbClr val="F5F7FA"/>
-                </a:solidFill>
-                <a:latin typeface="Segoe UI"/>
-              </a:defRPr>
-            </a:pPr>
-            <a:r>
-              <a:t>2027/2028: HBM4E debut. Over 2.4 TB/s stack speeds, VDDQ core voltage dropped further to cut heat.</a:t>
-            </a:r>
-          </a:p>
-          <a:p>
-            <a:pPr>
-              <a:spcAft>
-                <a:spcPts val="1400"/>
-              </a:spcAft>
-              <a:defRPr sz="1800">
-                <a:solidFill>
-                  <a:srgbClr val="F5F7FA"/>
-                </a:solidFill>
-                <a:latin typeface="Segoe UI"/>
-              </a:defRPr>
-            </a:pPr>
-            <a:r>
-              <a:t>2030+: Optical Waveguides. Replaces copper TSVs with silicon laser channels to bypass speed limits.</a:t>
-            </a:r>
-          </a:p>
-        </p:txBody>
-      </p:sp>
-    </p:spTree>
-  </p:cSld>
-  <p:clrMapOvr>
-    <a:masterClrMapping/>
-  </p:clrMapOvr>
-</p:sld>
-</file>
-
-<file path=ppt/slides/slide14.xml><?xml version="1.0" encoding="utf-8"?>
-<p:sld xmlns:a="http://schemas.openxmlformats.org/drawingml/2006/main" xmlns:p="http://schemas.openxmlformats.org/presentationml/2006/main" xmlns:r="http://schemas.openxmlformats.org/officeDocument/2006/relationships">
-  <p:cSld>
-    <p:bg>
-      <p:bgPr>
-        <a:solidFill>
-          <a:srgbClr val="0A0B14"/>
-        </a:solidFill>
-        <a:effectLst/>
-      </p:bgPr>
-    </p:bg>
-    <p:spTree>
-      <p:nvGrpSpPr>
-        <p:cNvPr id="1" name=""/>
-        <p:cNvGrpSpPr/>
-        <p:nvPr/>
-      </p:nvGrpSpPr>
-      <p:grpSpPr/>
-      <p:sp>
-        <p:nvSpPr>
-          <p:cNvPr id="2" name="TextBox 1"/>
-          <p:cNvSpPr txBox="1"/>
-          <p:nvPr/>
-        </p:nvSpPr>
-        <p:spPr>
-          <a:xfrm>
-            <a:off x="731520" y="457200"/>
-            <a:ext cx="10515600" cy="731520"/>
-          </a:xfrm>
-          <a:prstGeom prst="rect">
-            <a:avLst/>
-          </a:prstGeom>
-          <a:noFill/>
-        </p:spPr>
-        <p:txBody>
-          <a:bodyPr wrap="square">
-            <a:spAutoFit/>
-          </a:bodyPr>
-          <a:lstStyle/>
-          <a:p>
-            <a:pPr>
-              <a:defRPr sz="3600" b="1">
-                <a:solidFill>
-                  <a:srgbClr val="F5F7FA"/>
-                </a:solidFill>
-                <a:latin typeface="Segoe UI"/>
-              </a:defRPr>
-            </a:pPr>
-            <a:r>
-              <a:t>Technical Citations &amp; References</a:t>
-            </a:r>
-          </a:p>
-        </p:txBody>
-      </p:sp>
-      <p:sp>
-        <p:nvSpPr>
-          <p:cNvPr id="3" name="TextBox 2"/>
-          <p:cNvSpPr txBox="1"/>
-          <p:nvPr/>
-        </p:nvSpPr>
-        <p:spPr>
-          <a:xfrm>
-            <a:off x="731520" y="1463040"/>
-            <a:ext cx="10515600" cy="4389120"/>
-          </a:xfrm>
-          <a:prstGeom prst="rect">
-            <a:avLst/>
-          </a:prstGeom>
-          <a:noFill/>
-        </p:spPr>
-        <p:txBody>
-          <a:bodyPr wrap="square">
-            <a:spAutoFit/>
-          </a:bodyPr>
-          <a:lstStyle/>
-          <a:p>
-            <a:pPr>
-              <a:spcAft>
-                <a:spcPts val="1400"/>
-              </a:spcAft>
-              <a:defRPr sz="1800">
-                <a:solidFill>
-                  <a:srgbClr val="F5F7FA"/>
-                </a:solidFill>
-                <a:latin typeface="Segoe UI"/>
-              </a:defRPr>
-            </a:pPr>
-            <a:r>
-              <a:t>JEDEC Solid State Association: Defines the mechanical standard specifications and bus dimensions.</a:t>
-            </a:r>
-          </a:p>
-          <a:p>
-            <a:pPr>
-              <a:spcAft>
-                <a:spcPts val="1400"/>
-              </a:spcAft>
-              <a:defRPr sz="1800">
-                <a:solidFill>
-                  <a:srgbClr val="F5F7FA"/>
-                </a:solidFill>
-                <a:latin typeface="Segoe UI"/>
-              </a:defRPr>
-            </a:pPr>
-            <a:r>
-              <a:t>IEEE Xplore Journals: Explains thermal expansion stresses, micro-cracking, and silicon thinning methods.</a:t>
-            </a:r>
-          </a:p>
-          <a:p>
-            <a:pPr>
-              <a:spcAft>
-                <a:spcPts val="1400"/>
-              </a:spcAft>
-              <a:defRPr sz="1800">
-                <a:solidFill>
-                  <a:srgbClr val="F5F7FA"/>
-                </a:solidFill>
-                <a:latin typeface="Segoe UI"/>
-              </a:defRPr>
-            </a:pPr>
-            <a:r>
-              <a:t>TSMC CoWoS Technical Briefings: Guides layout routines for interposers, microbumps, and hybrid bonding.</a:t>
-            </a:r>
-          </a:p>
-        </p:txBody>
-      </p:sp>
-    </p:spTree>
-  </p:cSld>
-  <p:clrMapOvr>
-    <a:masterClrMapping/>
-  </p:clrMapOvr>
-</p:sld>
-</file>
-
-<file path=ppt/slides/slide15.xml><?xml version="1.0" encoding="utf-8"?>
-<p:sld xmlns:a="http://schemas.openxmlformats.org/drawingml/2006/main" xmlns:p="http://schemas.openxmlformats.org/presentationml/2006/main" xmlns:r="http://schemas.openxmlformats.org/officeDocument/2006/relationships">
-  <p:cSld>
-    <p:bg>
-      <p:bgPr>
-        <a:solidFill>
-          <a:srgbClr val="0A0B14"/>
-        </a:solidFill>
-        <a:effectLst/>
-      </p:bgPr>
-    </p:bg>
-    <p:spTree>
-      <p:nvGrpSpPr>
-        <p:cNvPr id="1" name=""/>
-        <p:cNvGrpSpPr/>
-        <p:nvPr/>
-      </p:nvGrpSpPr>
-      <p:grpSpPr/>
-      <p:sp>
-        <p:nvSpPr>
-          <p:cNvPr id="2" name="TextBox 1"/>
-          <p:cNvSpPr txBox="1"/>
-          <p:nvPr/>
-        </p:nvSpPr>
-        <p:spPr>
-          <a:xfrm>
-            <a:off x="914400" y="2560320"/>
-            <a:ext cx="10362895" cy="1645920"/>
-          </a:xfrm>
-          <a:prstGeom prst="rect">
-            <a:avLst/>
-          </a:prstGeom>
-          <a:noFill/>
-        </p:spPr>
-        <p:txBody>
-          <a:bodyPr wrap="square">
-            <a:spAutoFit/>
-          </a:bodyPr>
-          <a:lstStyle/>
-          <a:p>
-            <a:pPr algn="ctr">
-              <a:defRPr sz="6400" b="1">
-                <a:solidFill>
-                  <a:srgbClr val="F5F7FA"/>
-                </a:solidFill>
-                <a:latin typeface="Segoe UI"/>
-              </a:defRPr>
-            </a:pPr>
-            <a:r>
-              <a:t>THANK YOU</a:t>
-            </a:r>
-          </a:p>
-        </p:txBody>
-      </p:sp>
-    </p:spTree>
-  </p:cSld>
-  <p:clrMapOvr>
-    <a:masterClrMapping/>
-  </p:clrMapOvr>
-</p:sld>
-</file>
-
 <file path=ppt/slides/slide2.xml><?xml version="1.0" encoding="utf-8"?>
 <p:sld xmlns:a="http://schemas.openxmlformats.org/drawingml/2006/main" xmlns:p="http://schemas.openxmlformats.org/presentationml/2006/main" xmlns:r="http://schemas.openxmlformats.org/officeDocument/2006/relationships">
   <p:cSld>
@@ -4504,7 +3706,7 @@
               </a:defRPr>
             </a:pPr>
             <a:r>
-              <a:t>Silicon Interposer: The horizontal highway that connects the GPU side-by-side with the HBM Memory stack.</a:t>
+              <a:t>Silicon Interposer: The horizontal silicon highway that connects the GPU side-by-side with the HBM Memory stack.</a:t>
             </a:r>
           </a:p>
           <a:p>
@@ -4520,7 +3722,7 @@
               </a:defRPr>
             </a:pPr>
             <a:r>
-              <a:t>Custom Logic Base Die: The brain of the HBM stack. Built on advanced foundry nodes (TSMC/Samsung/Intel) to route signals.</a:t>
+              <a:t>Custom Logic Base Die: The buffer control die at the bottom. Built on advanced foundry nodes (TSMC N5) to schedule data.</a:t>
             </a:r>
           </a:p>
           <a:p>
@@ -4536,7 +3738,7 @@
               </a:defRPr>
             </a:pPr>
             <a:r>
-              <a:t>DRAM Stack (12/16-High): Thin memory layers stacked vertically on top of the logic die to maximize capacity.</a:t>
+              <a:t>DRAM Stack (12/16-High): Paper-thin memory layers stacked vertically on top of the logic base to packing storage capacity.</a:t>
             </a:r>
           </a:p>
           <a:p>
@@ -4552,7 +3754,7 @@
               </a:defRPr>
             </a:pPr>
             <a:r>
-              <a:t>Microbumps &amp; TSVs: Vertical connections that link the stacked layers to the base logic die.</a:t>
+              <a:t>Microbumps &amp; TSVs: Microscopic vertical copper wires drilled straight through silicon layers to connect stacked DRAM.</a:t>
             </a:r>
           </a:p>
         </p:txBody>
@@ -4614,7 +3816,7 @@
               </a:defRPr>
             </a:pPr>
             <a:r>
-              <a:t>Through-Silicon Vias (TSV): Vertical Wires</a:t>
+              <a:t>3D Stacking &amp; Processor Access Simulation</a:t>
             </a:r>
           </a:p>
         </p:txBody>
@@ -4650,7 +3852,7 @@
               </a:defRPr>
             </a:pPr>
             <a:r>
-              <a:t>Simply put: Instead of running long wires around the edges, TSVs are microscopic copper 'elevator shafts' drilled straight through the silicon, letting signals travel vertically and instantly.</a:t>
+              <a:t>HBM4 stacks memory layers vertically to bypass physical spacing limits, integrating 4 core operations:</a:t>
             </a:r>
           </a:p>
         </p:txBody>
@@ -4689,7 +3891,7 @@
               </a:defRPr>
             </a:pPr>
             <a:r>
-              <a:t>How They Are Made: Deep Reactive-Ion Etching carves vias through silicon, insulated with oxides, and filled with copper electroplating.</a:t>
+              <a:t>Instruction Fetch (IF): High-speed green data flows routing instruction codes from HBM stack to CPU cores.</a:t>
             </a:r>
           </a:p>
           <a:p>
@@ -4705,7 +3907,7 @@
               </a:defRPr>
             </a:pPr>
             <a:r>
-              <a:t>Why We Use Them: Shorter paths drop trace impedance, prevent heat generation, and open thousands of parallel vertical data lanes.</a:t>
+              <a:t>Data Read (RD): Standard blue signals transferring operands and parameters from HBM columns to GPU cores.</a:t>
             </a:r>
           </a:p>
           <a:p>
@@ -4721,7 +3923,23 @@
               </a:defRPr>
             </a:pPr>
             <a:r>
-              <a:t>Production Hurdles: Thinning DRAM wafers down to 30μm makes them fragile. Expansion differences can cause micro-cracking.</a:t>
+              <a:t>Data Write (WR): Pink data signals routing processed calculations back from GPU cores into DRAM cell rows.</a:t>
+            </a:r>
+          </a:p>
+          <a:p>
+            <a:pPr>
+              <a:spcAft>
+                <a:spcPts val="1400"/>
+              </a:spcAft>
+              <a:defRPr sz="1800">
+                <a:solidFill>
+                  <a:srgbClr val="F5F7FA"/>
+                </a:solidFill>
+                <a:latin typeface="Segoe UI"/>
+              </a:defRPr>
+            </a:pPr>
+            <a:r>
+              <a:t>Memory Refresh (RF): Amber sequencing sweeps that periodically recharge capacitive cells inside DRAM dies.</a:t>
             </a:r>
           </a:p>
         </p:txBody>
@@ -4783,7 +4001,7 @@
               </a:defRPr>
             </a:pPr>
             <a:r>
-              <a:t>3D Stack Visualization: Stacking Chips</a:t>
+              <a:t>Performance Metrics &amp; Specifications</a:t>
             </a:r>
           </a:p>
         </p:txBody>
@@ -4796,8 +4014,8 @@
         </p:nvSpPr>
         <p:spPr>
           <a:xfrm>
-            <a:off x="731520" y="1188720"/>
-            <a:ext cx="10515600" cy="731520"/>
+            <a:off x="731520" y="1463040"/>
+            <a:ext cx="4572000" cy="4389120"/>
           </a:xfrm>
           <a:prstGeom prst="rect">
             <a:avLst/>
@@ -4811,46 +4029,23 @@
           <a:lstStyle/>
           <a:p>
             <a:pPr>
-              <a:defRPr sz="1600" i="1">
-                <a:solidFill>
-                  <a:srgbClr val="8E9FB6"/>
+              <a:defRPr sz="1800" b="1">
+                <a:solidFill>
+                  <a:srgbClr val="4285F4"/>
                 </a:solidFill>
                 <a:latin typeface="Segoe UI"/>
               </a:defRPr>
             </a:pPr>
             <a:r>
-              <a:t>Simply put: Like building a skyscraper to fit more office space inside a small city block, HBM4 stacks memory layers vertically to save space and keep data lanes as close as possible.</a:t>
-            </a:r>
-          </a:p>
-        </p:txBody>
-      </p:sp>
-      <p:sp>
-        <p:nvSpPr>
-          <p:cNvPr id="4" name="TextBox 3"/>
-          <p:cNvSpPr txBox="1"/>
-          <p:nvPr/>
-        </p:nvSpPr>
-        <p:spPr>
-          <a:xfrm>
-            <a:off x="731520" y="2011680"/>
-            <a:ext cx="10515600" cy="3840480"/>
-          </a:xfrm>
-          <a:prstGeom prst="rect">
-            <a:avLst/>
-          </a:prstGeom>
-          <a:noFill/>
-        </p:spPr>
-        <p:txBody>
-          <a:bodyPr wrap="square">
-            <a:spAutoFit/>
-          </a:bodyPr>
-          <a:lstStyle/>
+              <a:t>BANDWIDTH PERFORMANCE</a:t>
+            </a:r>
+          </a:p>
           <a:p>
             <a:pPr>
               <a:spcAft>
-                <a:spcPts val="1400"/>
+                <a:spcPts val="800"/>
               </a:spcAft>
-              <a:defRPr sz="1800">
+              <a:defRPr sz="1500">
                 <a:solidFill>
                   <a:srgbClr val="F5F7FA"/>
                 </a:solidFill>
@@ -4858,15 +4053,15 @@
               </a:defRPr>
             </a:pPr>
             <a:r>
-              <a:t>3D Integration: Stacking DRAM layers vertically minimizes physical foot-space, packing more storage density.</a:t>
+              <a:t>DDR5: 38.4 GB/s (Baseline flat bus)</a:t>
             </a:r>
           </a:p>
           <a:p>
             <a:pPr>
               <a:spcAft>
-                <a:spcPts val="1400"/>
+                <a:spcPts val="800"/>
               </a:spcAft>
-              <a:defRPr sz="1800">
+              <a:defRPr sz="1500">
                 <a:solidFill>
                   <a:srgbClr val="F5F7FA"/>
                 </a:solidFill>
@@ -4874,15 +4069,15 @@
               </a:defRPr>
             </a:pPr>
             <a:r>
-              <a:t>Hybrid Bonding: Future HBM4 stacks will use copper-to-copper direct bonding, dropping pad spacing to under 10μm.</a:t>
+              <a:t>GDDR7: 192 GB/s (Dedicated graphics standard)</a:t>
             </a:r>
           </a:p>
           <a:p>
             <a:pPr>
               <a:spcAft>
-                <a:spcPts val="1400"/>
+                <a:spcPts val="800"/>
               </a:spcAft>
-              <a:defRPr sz="1800">
+              <a:defRPr sz="1500">
                 <a:solidFill>
                   <a:srgbClr val="F5F7FA"/>
                 </a:solidFill>
@@ -4890,11 +4085,504 @@
               </a:defRPr>
             </a:pPr>
             <a:r>
-              <a:t>Thermal Caps: Heat spreader metal plates are mounted on top of the stack to pull core heat away quickly.</a:t>
-            </a:r>
-          </a:p>
-        </p:txBody>
-      </p:sp>
+              <a:t>HBM3E: 1228 GB/s (Legacy stacked standard)</a:t>
+            </a:r>
+          </a:p>
+          <a:p>
+            <a:pPr>
+              <a:spcAft>
+                <a:spcPts val="800"/>
+              </a:spcAft>
+              <a:defRPr sz="1500">
+                <a:solidFill>
+                  <a:srgbClr val="F5F7FA"/>
+                </a:solidFill>
+                <a:latin typeface="Segoe UI"/>
+              </a:defRPr>
+            </a:pPr>
+            <a:r>
+              <a:t>HBM4: 2048 GB/s (Widescreen 2048-bit bus standard)</a:t>
+            </a:r>
+          </a:p>
+          <a:p>
+            <a:pPr>
+              <a:spcAft>
+                <a:spcPts val="800"/>
+              </a:spcAft>
+              <a:defRPr sz="1500">
+                <a:solidFill>
+                  <a:srgbClr val="F5F7FA"/>
+                </a:solidFill>
+                <a:latin typeface="Segoe UI"/>
+              </a:defRPr>
+            </a:pPr>
+            <a:r>
+              <a:t>HBM4E: 2457+ GB/s (Enhanced performance peak)</a:t>
+            </a:r>
+          </a:p>
+        </p:txBody>
+      </p:sp>
+      <p:graphicFrame>
+        <p:nvGraphicFramePr>
+          <p:cNvPr id="4" name="Table 3"/>
+          <p:cNvGraphicFramePr>
+            <a:graphicFrameLocks noGrp="1"/>
+          </p:cNvGraphicFramePr>
+          <p:nvPr/>
+        </p:nvGraphicFramePr>
+        <p:xfrm>
+          <a:off x="5669280" y="1463040"/>
+          <a:ext cx="5760720" cy="4114800"/>
+        </p:xfrm>
+        <a:graphic>
+          <a:graphicData uri="http://schemas.openxmlformats.org/drawingml/2006/table">
+            <a:tbl>
+              <a:tblPr firstRow="1" bandRow="1">
+                <a:tableStyleId>{5C22544A-7EE6-4342-B048-85BDC9FD1C3A}</a:tableStyleId>
+              </a:tblPr>
+              <a:tblGrid>
+                <a:gridCol w="2103120"/>
+                <a:gridCol w="1828800"/>
+                <a:gridCol w="1828800"/>
+              </a:tblGrid>
+              <a:tr h="587828">
+                <a:tc>
+                  <a:txBody>
+                    <a:bodyPr/>
+                    <a:lstStyle/>
+                    <a:p>
+                      <a:pPr>
+                        <a:defRPr sz="1300" b="1">
+                          <a:solidFill>
+                            <a:srgbClr val="9B72CB"/>
+                          </a:solidFill>
+                          <a:latin typeface="Segoe UI"/>
+                        </a:defRPr>
+                      </a:pPr>
+                      <a:r>
+                        <a:t>Feature Metric</a:t>
+                      </a:r>
+                    </a:p>
+                  </a:txBody>
+                  <a:tcPr/>
+                </a:tc>
+                <a:tc>
+                  <a:txBody>
+                    <a:bodyPr/>
+                    <a:lstStyle/>
+                    <a:p>
+                      <a:pPr>
+                        <a:defRPr sz="1300" b="1">
+                          <a:solidFill>
+                            <a:srgbClr val="9B72CB"/>
+                          </a:solidFill>
+                          <a:latin typeface="Segoe UI"/>
+                        </a:defRPr>
+                      </a:pPr>
+                      <a:r>
+                        <a:t>HBM4 Standard</a:t>
+                      </a:r>
+                    </a:p>
+                  </a:txBody>
+                  <a:tcPr/>
+                </a:tc>
+                <a:tc>
+                  <a:txBody>
+                    <a:bodyPr/>
+                    <a:lstStyle/>
+                    <a:p>
+                      <a:pPr>
+                        <a:defRPr sz="1300" b="1">
+                          <a:solidFill>
+                            <a:srgbClr val="9B72CB"/>
+                          </a:solidFill>
+                          <a:latin typeface="Segoe UI"/>
+                        </a:defRPr>
+                      </a:pPr>
+                      <a:r>
+                        <a:t>HBM4E (Enhanced)</a:t>
+                      </a:r>
+                    </a:p>
+                  </a:txBody>
+                  <a:tcPr/>
+                </a:tc>
+              </a:tr>
+              <a:tr h="587828">
+                <a:tc>
+                  <a:txBody>
+                    <a:bodyPr/>
+                    <a:lstStyle/>
+                    <a:p>
+                      <a:pPr>
+                        <a:defRPr sz="1300">
+                          <a:solidFill>
+                            <a:srgbClr val="F5F7FA"/>
+                          </a:solidFill>
+                          <a:latin typeface="Segoe UI"/>
+                        </a:defRPr>
+                      </a:pPr>
+                      <a:r>
+                        <a:t>Max Capacity</a:t>
+                      </a:r>
+                    </a:p>
+                  </a:txBody>
+                  <a:tcPr/>
+                </a:tc>
+                <a:tc>
+                  <a:txBody>
+                    <a:bodyPr/>
+                    <a:lstStyle/>
+                    <a:p>
+                      <a:pPr>
+                        <a:defRPr sz="1300">
+                          <a:solidFill>
+                            <a:srgbClr val="F5F7FA"/>
+                          </a:solidFill>
+                          <a:latin typeface="Segoe UI"/>
+                        </a:defRPr>
+                      </a:pPr>
+                      <a:r>
+                        <a:t>Up to 48 GB</a:t>
+                      </a:r>
+                    </a:p>
+                  </a:txBody>
+                  <a:tcPr/>
+                </a:tc>
+                <a:tc>
+                  <a:txBody>
+                    <a:bodyPr/>
+                    <a:lstStyle/>
+                    <a:p>
+                      <a:pPr>
+                        <a:defRPr sz="1300" b="1">
+                          <a:solidFill>
+                            <a:srgbClr val="D96BBA"/>
+                          </a:solidFill>
+                          <a:latin typeface="Segoe UI"/>
+                        </a:defRPr>
+                      </a:pPr>
+                      <a:r>
+                        <a:t>Up to 64 GB</a:t>
+                      </a:r>
+                    </a:p>
+                  </a:txBody>
+                  <a:tcPr/>
+                </a:tc>
+              </a:tr>
+              <a:tr h="587828">
+                <a:tc>
+                  <a:txBody>
+                    <a:bodyPr/>
+                    <a:lstStyle/>
+                    <a:p>
+                      <a:pPr>
+                        <a:defRPr sz="1300">
+                          <a:solidFill>
+                            <a:srgbClr val="F5F7FA"/>
+                          </a:solidFill>
+                          <a:latin typeface="Segoe UI"/>
+                        </a:defRPr>
+                      </a:pPr>
+                      <a:r>
+                        <a:t>Bus Width</a:t>
+                      </a:r>
+                    </a:p>
+                  </a:txBody>
+                  <a:tcPr/>
+                </a:tc>
+                <a:tc>
+                  <a:txBody>
+                    <a:bodyPr/>
+                    <a:lstStyle/>
+                    <a:p>
+                      <a:pPr>
+                        <a:defRPr sz="1300">
+                          <a:solidFill>
+                            <a:srgbClr val="F5F7FA"/>
+                          </a:solidFill>
+                          <a:latin typeface="Segoe UI"/>
+                        </a:defRPr>
+                      </a:pPr>
+                      <a:r>
+                        <a:t>2048-bit / 32 Ch</a:t>
+                      </a:r>
+                    </a:p>
+                  </a:txBody>
+                  <a:tcPr/>
+                </a:tc>
+                <a:tc>
+                  <a:txBody>
+                    <a:bodyPr/>
+                    <a:lstStyle/>
+                    <a:p>
+                      <a:pPr>
+                        <a:defRPr sz="1300">
+                          <a:solidFill>
+                            <a:srgbClr val="F5F7FA"/>
+                          </a:solidFill>
+                          <a:latin typeface="Segoe UI"/>
+                        </a:defRPr>
+                      </a:pPr>
+                      <a:r>
+                        <a:t>2048-bit / 32 Ch</a:t>
+                      </a:r>
+                    </a:p>
+                  </a:txBody>
+                  <a:tcPr/>
+                </a:tc>
+              </a:tr>
+              <a:tr h="587828">
+                <a:tc>
+                  <a:txBody>
+                    <a:bodyPr/>
+                    <a:lstStyle/>
+                    <a:p>
+                      <a:pPr>
+                        <a:defRPr sz="1300">
+                          <a:solidFill>
+                            <a:srgbClr val="F5F7FA"/>
+                          </a:solidFill>
+                          <a:latin typeface="Segoe UI"/>
+                        </a:defRPr>
+                      </a:pPr>
+                      <a:r>
+                        <a:t>Data Pin Speed</a:t>
+                      </a:r>
+                    </a:p>
+                  </a:txBody>
+                  <a:tcPr/>
+                </a:tc>
+                <a:tc>
+                  <a:txBody>
+                    <a:bodyPr/>
+                    <a:lstStyle/>
+                    <a:p>
+                      <a:pPr>
+                        <a:defRPr sz="1300">
+                          <a:solidFill>
+                            <a:srgbClr val="F5F7FA"/>
+                          </a:solidFill>
+                          <a:latin typeface="Segoe UI"/>
+                        </a:defRPr>
+                      </a:pPr>
+                      <a:r>
+                        <a:t>8.0 Gbps</a:t>
+                      </a:r>
+                    </a:p>
+                  </a:txBody>
+                  <a:tcPr/>
+                </a:tc>
+                <a:tc>
+                  <a:txBody>
+                    <a:bodyPr/>
+                    <a:lstStyle/>
+                    <a:p>
+                      <a:pPr>
+                        <a:defRPr sz="1300" b="1">
+                          <a:solidFill>
+                            <a:srgbClr val="D96BBA"/>
+                          </a:solidFill>
+                          <a:latin typeface="Segoe UI"/>
+                        </a:defRPr>
+                      </a:pPr>
+                      <a:r>
+                        <a:t>9.6+ Gbps</a:t>
+                      </a:r>
+                    </a:p>
+                  </a:txBody>
+                  <a:tcPr/>
+                </a:tc>
+              </a:tr>
+              <a:tr h="587828">
+                <a:tc>
+                  <a:txBody>
+                    <a:bodyPr/>
+                    <a:lstStyle/>
+                    <a:p>
+                      <a:pPr>
+                        <a:defRPr sz="1300">
+                          <a:solidFill>
+                            <a:srgbClr val="F5F7FA"/>
+                          </a:solidFill>
+                          <a:latin typeface="Segoe UI"/>
+                        </a:defRPr>
+                      </a:pPr>
+                      <a:r>
+                        <a:t>Peak Bandwidth</a:t>
+                      </a:r>
+                    </a:p>
+                  </a:txBody>
+                  <a:tcPr/>
+                </a:tc>
+                <a:tc>
+                  <a:txBody>
+                    <a:bodyPr/>
+                    <a:lstStyle/>
+                    <a:p>
+                      <a:pPr>
+                        <a:defRPr sz="1300">
+                          <a:solidFill>
+                            <a:srgbClr val="F5F7FA"/>
+                          </a:solidFill>
+                          <a:latin typeface="Segoe UI"/>
+                        </a:defRPr>
+                      </a:pPr>
+                      <a:r>
+                        <a:t>2.0 TB/s</a:t>
+                      </a:r>
+                    </a:p>
+                  </a:txBody>
+                  <a:tcPr/>
+                </a:tc>
+                <a:tc>
+                  <a:txBody>
+                    <a:bodyPr/>
+                    <a:lstStyle/>
+                    <a:p>
+                      <a:pPr>
+                        <a:defRPr sz="1300" b="1">
+                          <a:solidFill>
+                            <a:srgbClr val="D96BBA"/>
+                          </a:solidFill>
+                          <a:latin typeface="Segoe UI"/>
+                        </a:defRPr>
+                      </a:pPr>
+                      <a:r>
+                        <a:t>2.45+ TB/s</a:t>
+                      </a:r>
+                    </a:p>
+                  </a:txBody>
+                  <a:tcPr/>
+                </a:tc>
+              </a:tr>
+              <a:tr h="587828">
+                <a:tc>
+                  <a:txBody>
+                    <a:bodyPr/>
+                    <a:lstStyle/>
+                    <a:p>
+                      <a:pPr>
+                        <a:defRPr sz="1300">
+                          <a:solidFill>
+                            <a:srgbClr val="F5F7FA"/>
+                          </a:solidFill>
+                          <a:latin typeface="Segoe UI"/>
+                        </a:defRPr>
+                      </a:pPr>
+                      <a:r>
+                        <a:t>Logic Node</a:t>
+                      </a:r>
+                    </a:p>
+                  </a:txBody>
+                  <a:tcPr/>
+                </a:tc>
+                <a:tc>
+                  <a:txBody>
+                    <a:bodyPr/>
+                    <a:lstStyle/>
+                    <a:p>
+                      <a:pPr>
+                        <a:defRPr sz="1300">
+                          <a:solidFill>
+                            <a:srgbClr val="F5F7FA"/>
+                          </a:solidFill>
+                          <a:latin typeface="Segoe UI"/>
+                        </a:defRPr>
+                      </a:pPr>
+                      <a:r>
+                        <a:t>TSMC Custom N5</a:t>
+                      </a:r>
+                    </a:p>
+                  </a:txBody>
+                  <a:tcPr/>
+                </a:tc>
+                <a:tc>
+                  <a:txBody>
+                    <a:bodyPr/>
+                    <a:lstStyle/>
+                    <a:p>
+                      <a:pPr>
+                        <a:defRPr sz="1300">
+                          <a:solidFill>
+                            <a:srgbClr val="F5F7FA"/>
+                          </a:solidFill>
+                          <a:latin typeface="Segoe UI"/>
+                        </a:defRPr>
+                      </a:pPr>
+                      <a:r>
+                        <a:t>TSMC Custom N5</a:t>
+                      </a:r>
+                    </a:p>
+                  </a:txBody>
+                  <a:tcPr/>
+                </a:tc>
+              </a:tr>
+              <a:tr h="587832">
+                <a:tc>
+                  <a:txBody>
+                    <a:bodyPr/>
+                    <a:lstStyle/>
+                    <a:p>
+                      <a:pPr>
+                        <a:defRPr sz="1300">
+                          <a:solidFill>
+                            <a:srgbClr val="F5F7FA"/>
+                          </a:solidFill>
+                          <a:latin typeface="Segoe UI"/>
+                        </a:defRPr>
+                      </a:pPr>
+                      <a:r>
+                        <a:t>Stacking Height</a:t>
+                      </a:r>
+                    </a:p>
+                  </a:txBody>
+                  <a:tcPr/>
+                </a:tc>
+                <a:tc>
+                  <a:txBody>
+                    <a:bodyPr/>
+                    <a:lstStyle/>
+                    <a:p>
+                      <a:pPr>
+                        <a:defRPr sz="1300">
+                          <a:solidFill>
+                            <a:srgbClr val="F5F7FA"/>
+                          </a:solidFill>
+                          <a:latin typeface="Segoe UI"/>
+                        </a:defRPr>
+                      </a:pPr>
+                      <a:r>
+                        <a:t>12 / 16 Layers</a:t>
+                      </a:r>
+                    </a:p>
+                  </a:txBody>
+                  <a:tcPr/>
+                </a:tc>
+                <a:tc>
+                  <a:txBody>
+                    <a:bodyPr/>
+                    <a:lstStyle/>
+                    <a:p>
+                      <a:pPr>
+                        <a:defRPr sz="1300">
+                          <a:solidFill>
+                            <a:srgbClr val="F5F7FA"/>
+                          </a:solidFill>
+                          <a:latin typeface="Segoe UI"/>
+                        </a:defRPr>
+                      </a:pPr>
+                      <a:r>
+                        <a:t>12 / 16 Layers</a:t>
+                      </a:r>
+                    </a:p>
+                  </a:txBody>
+                  <a:tcPr/>
+                </a:tc>
+              </a:tr>
+            </a:tbl>
+          </a:graphicData>
+        </a:graphic>
+      </p:graphicFrame>
     </p:spTree>
   </p:cSld>
   <p:clrMapOvr>
@@ -4952,7 +4640,7 @@
               </a:defRPr>
             </a:pPr>
             <a:r>
-              <a:t>Pin Configurations &amp; Interface Speeds</a:t>
+              <a:t>Manufacturing &amp; Thermal Management</a:t>
             </a:r>
           </a:p>
         </p:txBody>
@@ -4966,7 +4654,7 @@
         <p:spPr>
           <a:xfrm>
             <a:off x="731520" y="1463040"/>
-            <a:ext cx="10515600" cy="4389120"/>
+            <a:ext cx="5303520" cy="4389120"/>
           </a:xfrm>
           <a:prstGeom prst="rect">
             <a:avLst/>
@@ -4980,18 +4668,15 @@
           <a:lstStyle/>
           <a:p>
             <a:pPr>
-              <a:spcAft>
-                <a:spcPts val="1200"/>
-              </a:spcAft>
-              <a:defRPr sz="1800">
-                <a:solidFill>
-                  <a:srgbClr val="F5F7FA"/>
+              <a:defRPr sz="1800" b="1">
+                <a:solidFill>
+                  <a:srgbClr val="4285F4"/>
                 </a:solidFill>
                 <a:latin typeface="Segoe UI"/>
               </a:defRPr>
             </a:pPr>
             <a:r>
-              <a:t>2048-Bit Bus Width: HBM4 doubles the bus width of HBM3E (from 1024 to 2048 lines), widening the highway.</a:t>
+              <a:t>3D MANUFACTURING WORKFLOW</a:t>
             </a:r>
           </a:p>
           <a:p>
@@ -4999,7 +4684,7 @@
               <a:spcAft>
                 <a:spcPts val="1200"/>
               </a:spcAft>
-              <a:defRPr sz="1800">
+              <a:defRPr sz="1400">
                 <a:solidFill>
                   <a:srgbClr val="F5F7FA"/>
                 </a:solidFill>
@@ -5007,7 +4692,7 @@
               </a:defRPr>
             </a:pPr>
             <a:r>
-              <a:t>Sub-10μm Stacking Pitch: Compact direct hybrid copper-to-copper links bypass old microbump solder thickness parameters.</a:t>
+              <a:t>01. TSV Drilling: Deep RIE lasers drill microscopic channels straight through wafers, filling them with copper to construct vertical conduits.</a:t>
             </a:r>
           </a:p>
           <a:p>
@@ -5015,7 +4700,7 @@
               <a:spcAft>
                 <a:spcPts val="1200"/>
               </a:spcAft>
-              <a:defRPr sz="1800">
+              <a:defRPr sz="1400">
                 <a:solidFill>
                   <a:srgbClr val="F5F7FA"/>
                 </a:solidFill>
@@ -5023,7 +4708,7 @@
               </a:defRPr>
             </a:pPr>
             <a:r>
-              <a:t>Data Bandwidth: HBM4 reaches up to 2.0 TB/s per stack, while HBM4E scales beyond 2.4 TB/s.</a:t>
+              <a:t>02. Wafer Thinning: Silicon substrates are ground down to paper-thin ~30μm dimensions to enable multi-layered stacking heights.</a:t>
             </a:r>
           </a:p>
           <a:p>
@@ -5031,7 +4716,7 @@
               <a:spcAft>
                 <a:spcPts val="1200"/>
               </a:spcAft>
-              <a:defRPr sz="1800">
+              <a:defRPr sz="1400">
                 <a:solidFill>
                   <a:srgbClr val="F5F7FA"/>
                 </a:solidFill>
@@ -5039,7 +4724,107 @@
               </a:defRPr>
             </a:pPr>
             <a:r>
-              <a:t>Pins Count: Scales to over 5,000 interconnect channels per stack, supporting massive parallel computing lanes.</a:t>
+              <a:t>03. Hybrid Bonding: Direct atomic Copper-to-Copper fusion merges DRAM layers together, dropping pad pitches below 10μm.</a:t>
+            </a:r>
+          </a:p>
+        </p:txBody>
+      </p:sp>
+      <p:sp>
+        <p:nvSpPr>
+          <p:cNvPr id="4" name="TextBox 3"/>
+          <p:cNvSpPr txBox="1"/>
+          <p:nvPr/>
+        </p:nvSpPr>
+        <p:spPr>
+          <a:xfrm>
+            <a:off x="6400800" y="1463040"/>
+            <a:ext cx="5029200" cy="4389120"/>
+          </a:xfrm>
+          <a:prstGeom prst="rect">
+            <a:avLst/>
+          </a:prstGeom>
+          <a:noFill/>
+        </p:spPr>
+        <p:txBody>
+          <a:bodyPr wrap="square">
+            <a:spAutoFit/>
+          </a:bodyPr>
+          <a:lstStyle/>
+          <a:p>
+            <a:pPr>
+              <a:defRPr sz="1800" b="1">
+                <a:solidFill>
+                  <a:srgbClr val="D96BBA"/>
+                </a:solidFill>
+                <a:latin typeface="Segoe UI"/>
+              </a:defRPr>
+            </a:pPr>
+            <a:r>
+              <a:t>THERMAL HEAT DISSIPATION MAP</a:t>
+            </a:r>
+          </a:p>
+          <a:p>
+            <a:pPr>
+              <a:spcAft>
+                <a:spcPts val="1200"/>
+              </a:spcAft>
+              <a:defRPr sz="1400">
+                <a:solidFill>
+                  <a:srgbClr val="F5F7FA"/>
+                </a:solidFill>
+                <a:latin typeface="Segoe UI"/>
+              </a:defRPr>
+            </a:pPr>
+            <a:r>
+              <a:t>Thermal Penalty: Stacking 16 hot memory layers traps high-power heat in the core logic.</a:t>
+            </a:r>
+          </a:p>
+          <a:p>
+            <a:pPr>
+              <a:spcAft>
+                <a:spcPts val="1200"/>
+              </a:spcAft>
+              <a:defRPr sz="1400">
+                <a:solidFill>
+                  <a:srgbClr val="F5F7FA"/>
+                </a:solidFill>
+                <a:latin typeface="Segoe UI"/>
+              </a:defRPr>
+            </a:pPr>
+            <a:r>
+              <a:t>TIM Materials: Advanced interface materials with high thermal conductivity conduct heat up to top lids.</a:t>
+            </a:r>
+          </a:p>
+          <a:p>
+            <a:pPr>
+              <a:spcAft>
+                <a:spcPts val="1200"/>
+              </a:spcAft>
+              <a:defRPr sz="1400">
+                <a:solidFill>
+                  <a:srgbClr val="F5F7FA"/>
+                </a:solidFill>
+                <a:latin typeface="Segoe UI"/>
+              </a:defRPr>
+            </a:pPr>
+            <a:r>
+              <a:t>Dummy Vias: Unconnected dummy TSVs are placed inside memory layers to act as passive heat pipeline guides.</a:t>
+            </a:r>
+          </a:p>
+          <a:p>
+            <a:pPr>
+              <a:spcAft>
+                <a:spcPts val="1200"/>
+              </a:spcAft>
+              <a:defRPr sz="1400">
+                <a:solidFill>
+                  <a:srgbClr val="F5F7FA"/>
+                </a:solidFill>
+                <a:latin typeface="Segoe UI"/>
+              </a:defRPr>
+            </a:pPr>
+            <a:r>
+              <a:t>Top cap: 45°C | Stack core: 78°C | Logic die: 60°C</a:t>
             </a:r>
           </a:p>
         </p:txBody>
@@ -5078,8 +4863,8 @@
         </p:nvSpPr>
         <p:spPr>
           <a:xfrm>
-            <a:off x="731520" y="457200"/>
-            <a:ext cx="10515600" cy="731520"/>
+            <a:off x="914400" y="2560320"/>
+            <a:ext cx="10362895" cy="1645920"/>
           </a:xfrm>
           <a:prstGeom prst="rect">
             <a:avLst/>
@@ -5092,8 +4877,8 @@
           </a:bodyPr>
           <a:lstStyle/>
           <a:p>
-            <a:pPr>
-              <a:defRPr sz="3600" b="1">
+            <a:pPr algn="ctr">
+              <a:defRPr sz="6400" b="1">
                 <a:solidFill>
                   <a:srgbClr val="F5F7FA"/>
                 </a:solidFill>
@@ -5101,259 +4886,7 @@
               </a:defRPr>
             </a:pPr>
             <a:r>
-              <a:t>Manufacturing Workflow</a:t>
-            </a:r>
-          </a:p>
-        </p:txBody>
-      </p:sp>
-      <p:sp>
-        <p:nvSpPr>
-          <p:cNvPr id="3" name="TextBox 2"/>
-          <p:cNvSpPr txBox="1"/>
-          <p:nvPr/>
-        </p:nvSpPr>
-        <p:spPr>
-          <a:xfrm>
-            <a:off x="731520" y="1463040"/>
-            <a:ext cx="10515600" cy="4389120"/>
-          </a:xfrm>
-          <a:prstGeom prst="rect">
-            <a:avLst/>
-          </a:prstGeom>
-          <a:noFill/>
-        </p:spPr>
-        <p:txBody>
-          <a:bodyPr wrap="square">
-            <a:spAutoFit/>
-          </a:bodyPr>
-          <a:lstStyle/>
-          <a:p>
-            <a:pPr>
-              <a:spcAft>
-                <a:spcPts val="1400"/>
-              </a:spcAft>
-              <a:defRPr sz="1800">
-                <a:solidFill>
-                  <a:srgbClr val="F5F7FA"/>
-                </a:solidFill>
-                <a:latin typeface="Segoe UI"/>
-              </a:defRPr>
-            </a:pPr>
-            <a:r>
-              <a:t>Stage 1: Wafer Thinning. DRAM wafers are ground down to ~30-40μm thickness (thin as paper).</a:t>
-            </a:r>
-          </a:p>
-          <a:p>
-            <a:pPr>
-              <a:spcAft>
-                <a:spcPts val="1400"/>
-              </a:spcAft>
-              <a:defRPr sz="1800">
-                <a:solidFill>
-                  <a:srgbClr val="F5F7FA"/>
-                </a:solidFill>
-                <a:latin typeface="Segoe UI"/>
-              </a:defRPr>
-            </a:pPr>
-            <a:r>
-              <a:t>Stage 2: Laser Via Drilling. Drills microscopic TSV holes straight through memory chip surfaces.</a:t>
-            </a:r>
-          </a:p>
-          <a:p>
-            <a:pPr>
-              <a:spcAft>
-                <a:spcPts val="1400"/>
-              </a:spcAft>
-              <a:defRPr sz="1800">
-                <a:solidFill>
-                  <a:srgbClr val="F5F7FA"/>
-                </a:solidFill>
-                <a:latin typeface="Segoe UI"/>
-              </a:defRPr>
-            </a:pPr>
-            <a:r>
-              <a:t>Stage 3: Hybrid Bonding. Copper pads are aligned and bonded directly at room temperature without solder.</a:t>
-            </a:r>
-          </a:p>
-          <a:p>
-            <a:pPr>
-              <a:spcAft>
-                <a:spcPts val="1400"/>
-              </a:spcAft>
-              <a:defRPr sz="1800">
-                <a:solidFill>
-                  <a:srgbClr val="F5F7FA"/>
-                </a:solidFill>
-                <a:latin typeface="Segoe UI"/>
-              </a:defRPr>
-            </a:pPr>
-            <a:r>
-              <a:t>Stage 4: Underfill Encapsulation. Liquid epoxy is injected between dies to lock the stack against moisture.</a:t>
-            </a:r>
-          </a:p>
-        </p:txBody>
-      </p:sp>
-    </p:spTree>
-  </p:cSld>
-  <p:clrMapOvr>
-    <a:masterClrMapping/>
-  </p:clrMapOvr>
-</p:sld>
-</file>
-
-<file path=ppt/slides/slide9.xml><?xml version="1.0" encoding="utf-8"?>
-<p:sld xmlns:a="http://schemas.openxmlformats.org/drawingml/2006/main" xmlns:p="http://schemas.openxmlformats.org/presentationml/2006/main" xmlns:r="http://schemas.openxmlformats.org/officeDocument/2006/relationships">
-  <p:cSld>
-    <p:bg>
-      <p:bgPr>
-        <a:solidFill>
-          <a:srgbClr val="0A0B14"/>
-        </a:solidFill>
-        <a:effectLst/>
-      </p:bgPr>
-    </p:bg>
-    <p:spTree>
-      <p:nvGrpSpPr>
-        <p:cNvPr id="1" name=""/>
-        <p:cNvGrpSpPr/>
-        <p:nvPr/>
-      </p:nvGrpSpPr>
-      <p:grpSpPr/>
-      <p:sp>
-        <p:nvSpPr>
-          <p:cNvPr id="2" name="TextBox 1"/>
-          <p:cNvSpPr txBox="1"/>
-          <p:nvPr/>
-        </p:nvSpPr>
-        <p:spPr>
-          <a:xfrm>
-            <a:off x="731520" y="457200"/>
-            <a:ext cx="10515600" cy="731520"/>
-          </a:xfrm>
-          <a:prstGeom prst="rect">
-            <a:avLst/>
-          </a:prstGeom>
-          <a:noFill/>
-        </p:spPr>
-        <p:txBody>
-          <a:bodyPr wrap="square">
-            <a:spAutoFit/>
-          </a:bodyPr>
-          <a:lstStyle/>
-          <a:p>
-            <a:pPr>
-              <a:defRPr sz="3600" b="1">
-                <a:solidFill>
-                  <a:srgbClr val="F5F7FA"/>
-                </a:solidFill>
-                <a:latin typeface="Segoe UI"/>
-              </a:defRPr>
-            </a:pPr>
-            <a:r>
-              <a:t>Physical Attributes Comparison</a:t>
-            </a:r>
-          </a:p>
-        </p:txBody>
-      </p:sp>
-      <p:sp>
-        <p:nvSpPr>
-          <p:cNvPr id="3" name="TextBox 2"/>
-          <p:cNvSpPr txBox="1"/>
-          <p:nvPr/>
-        </p:nvSpPr>
-        <p:spPr>
-          <a:xfrm>
-            <a:off x="731520" y="1463040"/>
-            <a:ext cx="10515600" cy="4389120"/>
-          </a:xfrm>
-          <a:prstGeom prst="rect">
-            <a:avLst/>
-          </a:prstGeom>
-          <a:noFill/>
-        </p:spPr>
-        <p:txBody>
-          <a:bodyPr wrap="square">
-            <a:spAutoFit/>
-          </a:bodyPr>
-          <a:lstStyle/>
-          <a:p>
-            <a:pPr>
-              <a:spcAft>
-                <a:spcPts val="1200"/>
-              </a:spcAft>
-              <a:defRPr sz="1800">
-                <a:solidFill>
-                  <a:srgbClr val="F5F7FA"/>
-                </a:solidFill>
-                <a:latin typeface="Segoe UI"/>
-              </a:defRPr>
-            </a:pPr>
-            <a:r>
-              <a:t>Bus Width: HBM2/3 (1024-bit) vs. HBM4/4E (2048-bit).</a:t>
-            </a:r>
-          </a:p>
-          <a:p>
-            <a:pPr>
-              <a:spcAft>
-                <a:spcPts val="1200"/>
-              </a:spcAft>
-              <a:defRPr sz="1800">
-                <a:solidFill>
-                  <a:srgbClr val="F5F7FA"/>
-                </a:solidFill>
-                <a:latin typeface="Segoe UI"/>
-              </a:defRPr>
-            </a:pPr>
-            <a:r>
-              <a:t>Pin Speed: HBM3E (9.6 Gbps) vs. HBM4 (14.0 Gbps) and HBM4E (16.0+ Gbps).</a:t>
-            </a:r>
-          </a:p>
-          <a:p>
-            <a:pPr>
-              <a:spcAft>
-                <a:spcPts val="1200"/>
-              </a:spcAft>
-              <a:defRPr sz="1800">
-                <a:solidFill>
-                  <a:srgbClr val="F5F7FA"/>
-                </a:solidFill>
-                <a:latin typeface="Segoe UI"/>
-              </a:defRPr>
-            </a:pPr>
-            <a:r>
-              <a:t>Capacity per Stack: HBM3 (24 GB) vs. HBM4 (48 GB) and HBM4E (64 GB).</a:t>
-            </a:r>
-          </a:p>
-          <a:p>
-            <a:pPr>
-              <a:spcAft>
-                <a:spcPts val="1200"/>
-              </a:spcAft>
-              <a:defRPr sz="1800">
-                <a:solidFill>
-                  <a:srgbClr val="F5F7FA"/>
-                </a:solidFill>
-                <a:latin typeface="Segoe UI"/>
-              </a:defRPr>
-            </a:pPr>
-            <a:r>
-              <a:t>Bandwidth per Stack: HBM3E (1.2 TB/s) vs. HBM4 (2.0 TB/s) and HBM4E (2.4+ TB/s).</a:t>
-            </a:r>
-          </a:p>
-          <a:p>
-            <a:pPr>
-              <a:spcAft>
-                <a:spcPts val="1200"/>
-              </a:spcAft>
-              <a:defRPr sz="1800">
-                <a:solidFill>
-                  <a:srgbClr val="F5F7FA"/>
-                </a:solidFill>
-                <a:latin typeface="Segoe UI"/>
-              </a:defRPr>
-            </a:pPr>
-            <a:r>
-              <a:t>Interconnect Pitch: microbumps (~25μm) vs. hybrid direct copper-to-copper bonding (&lt;10μm).</a:t>
+              <a:t>THANK YOU</a:t>
             </a:r>
           </a:p>
         </p:txBody>

--- a/HBM4_HBM4E_Showcase.pptx
+++ b/HBM4_HBM4E_Showcase.pptx
@@ -3147,8 +3147,8 @@
         </p:nvSpPr>
         <p:spPr>
           <a:xfrm>
-            <a:off x="731520" y="3108960"/>
-            <a:ext cx="10515600" cy="1097280"/>
+            <a:off x="731520" y="2926080"/>
+            <a:ext cx="10515600" cy="1828800"/>
           </a:xfrm>
           <a:prstGeom prst="rect">
             <a:avLst/>
@@ -3162,6 +3162,25 @@
           <a:lstStyle/>
           <a:p>
             <a:pPr>
+              <a:spcAft>
+                <a:spcPts val="600"/>
+              </a:spcAft>
+              <a:defRPr sz="2400" b="1">
+                <a:solidFill>
+                  <a:srgbClr val="F5F7FA"/>
+                </a:solidFill>
+                <a:latin typeface="Segoe UI"/>
+              </a:defRPr>
+            </a:pPr>
+            <a:r>
+              <a:t>Presented by: Jai Akash T</a:t>
+            </a:r>
+          </a:p>
+          <a:p>
+            <a:pPr>
+              <a:spcAft>
+                <a:spcPts val="600"/>
+              </a:spcAft>
               <a:defRPr sz="2000" b="1">
                 <a:solidFill>
                   <a:srgbClr val="9B72CB"/>
@@ -3170,11 +3189,20 @@
               </a:defRPr>
             </a:pPr>
             <a:r>
-              <a:t>Presented by: Jai Akash T</a:t>
-            </a:r>
-            <a:br/>
-            <a:r>
-              <a:t>Electronics &amp; Communication Engineering (ECE)</a:t>
+              <a:t>Register Number: 243115106037</a:t>
+            </a:r>
+          </a:p>
+          <a:p>
+            <a:pPr>
+              <a:defRPr sz="2000" b="1">
+                <a:solidFill>
+                  <a:srgbClr val="9B72CB"/>
+                </a:solidFill>
+                <a:latin typeface="Segoe UI"/>
+              </a:defRPr>
+            </a:pPr>
+            <a:r>
+              <a:t>Class Section: ECE-3A</a:t>
             </a:r>
           </a:p>
         </p:txBody>
